--- a/public/fun/pack/pptx/newspro/카드뉴스프리미엄_05_오늘의한마디_라일락실버.pptx
+++ b/public/fun/pack/pptx/newspro/카드뉴스프리미엄_05_오늘의한마디_라일락실버.pptx
@@ -113,12 +113,12 @@
   <p:extLst>
     <p:ext uri="{521415D9-36F7-43E2-AB2F-B90AF26B5E84}">
       <p14:sectionLst xmlns:p14="http://schemas.microsoft.com/office/powerpoint/2010/main">
-        <p14:section name="시작" id="{15B88ED8-38DE-45AB-A7FC-CE3552A7B9D8}">
+        <p14:section name="시작" id="{93F5CAEA-4838-4BA7-AE6B-BB04084D5E9D}">
           <p14:sldIdLst>
             <p14:sldId id="256"/>
           </p14:sldIdLst>
         </p14:section>
-        <p14:section name="본문" id="{59F35A0B-FE4C-4FB3-BA45-83C6AC9C0528}">
+        <p14:section name="본문" id="{AD47C400-C163-4DD9-ADC8-E57EC2C5DF01}">
           <p14:sldIdLst>
             <p14:sldId id="257"/>
             <p14:sldId id="258"/>
@@ -127,7 +127,7 @@
             <p14:sldId id="261"/>
           </p14:sldIdLst>
         </p14:section>
-        <p14:section name="마무리" id="{6B7E2EE3-F090-4850-B4CA-03A8C8008E4B}">
+        <p14:section name="마무리" id="{DF8E9FD4-DCA5-4C20-BB94-67D49E07B186}">
           <p14:sldIdLst>
             <p14:sldId id="262"/>
           </p14:sldIdLst>
@@ -1536,7 +1536,7 @@
             </a:lvl1pPr>
           </a:lstStyle>
           <a:p>
-            <a:fld id="{F6E766DD-5A7E-4AB6-97DA-00FC67C7E40F}" type="slidenum">
+            <a:fld id="{DEC69698-F1E9-4BFB-AE91-9A1D881E746A}" type="slidenum">
               <a:rPr lang="en-US"/>
               <a:t>‹#›</a:t>
             </a:fld>
@@ -2129,7 +2129,7 @@
             </a:lvl1pPr>
           </a:lstStyle>
           <a:p>
-            <a:fld id="{3E35F8B7-2EC4-422F-BCAD-5613AD9E6549}" type="slidenum">
+            <a:fld id="{DE34DD7A-D5CA-41B7-BE14-4FD6F85AB2D8}" type="slidenum">
               <a:rPr lang="en-US"/>
               <a:t>‹#›</a:t>
             </a:fld>
@@ -2726,7 +2726,7 @@
             </a:lvl1pPr>
           </a:lstStyle>
           <a:p>
-            <a:fld id="{89CD0158-DAEC-4587-9919-F97C540AB715}" type="slidenum">
+            <a:fld id="{F86C88B7-4D8F-410D-88ED-77618274BC8C}" type="slidenum">
               <a:rPr lang="en-US"/>
               <a:t>‹#›</a:t>
             </a:fld>
@@ -3614,7 +3614,7 @@
           <a:bodyPr/>
           <a:lstStyle/>
           <a:p>
-            <a:fld id="{3FF869C0-11F0-4F89-8D95-6B76F51BC06A}" type="slidenum">
+            <a:fld id="{DBF37636-798D-47EE-9BC0-8CA3D80888FC}" type="slidenum">
               <a:rPr lang="en-US"/>
               <a:t>‹#›</a:t>
             </a:fld>
@@ -3780,7 +3780,7 @@
           <a:bodyPr/>
           <a:lstStyle/>
           <a:p>
-            <a:fld id="{063E1BCE-00DA-4D5E-9D60-30616A5C5FCA}" type="slidenum">
+            <a:fld id="{F063C0B4-199B-4F04-9AF5-6C07C1F35C93}" type="slidenum">
               <a:rPr lang="en-US"/>
               <a:t>‹#›</a:t>
             </a:fld>
@@ -3946,7 +3946,7 @@
           <a:bodyPr/>
           <a:lstStyle/>
           <a:p>
-            <a:fld id="{532C4A2E-E708-4A6A-BD8B-147D5D28E419}" type="slidenum">
+            <a:fld id="{73273168-CEDA-4E2B-AC9A-166013FC9BF0}" type="slidenum">
               <a:rPr lang="en-US"/>
               <a:t>‹#›</a:t>
             </a:fld>
@@ -4112,7 +4112,7 @@
           <a:bodyPr/>
           <a:lstStyle/>
           <a:p>
-            <a:fld id="{464A8477-054F-4F4B-8A39-7811BEBD312D}" type="slidenum">
+            <a:fld id="{17CCCE34-7051-4BBB-A4A1-995B22B3DC20}" type="slidenum">
               <a:rPr lang="en-US"/>
               <a:t>‹#›</a:t>
             </a:fld>
@@ -4278,7 +4278,7 @@
           <a:bodyPr/>
           <a:lstStyle/>
           <a:p>
-            <a:fld id="{752E62A5-6777-4937-9195-953C4F05EFF3}" type="slidenum">
+            <a:fld id="{3CC80D81-A5E9-40BB-812A-5BEAFBDEF8DA}" type="slidenum">
               <a:rPr lang="en-US"/>
               <a:t>‹#›</a:t>
             </a:fld>
